--- a/output/fundraising/NeonShift_募資簡報_中文草稿_v4.pptx
+++ b/output/fundraising/NeonShift_募資簡報_中文草稿_v4.pptx
@@ -25814,7 +25814,7 @@
                 <a:latin typeface="Microsoft JhengHei"/>
                 <a:ea typeface="Microsoft JhengHei"/>
               </a:rPr>
-              <a:t>步數與睡眠任務</a:t>
+              <a:t>步數任務</a:t>
             </a:r>
           </a:p>
           <a:p>
